--- a/decks/day2/module-4-tools-layer.pptx
+++ b/decks/day2/module-4-tools-layer.pptx
@@ -6326,7 +6326,7 @@
                 <a:ea typeface="Calibri" pitchFamily="34" charset="-122"/>
                 <a:cs typeface="Calibri" pitchFamily="34" charset="-120"/>
               </a:rPr>
-              <a:t>Attendees will build things where either could work: 'should I make this a tool call to search docs, or attach a knowledge base?'</a:t>
+              <a:t>You'll build things where either could work: 'should I make this a tool call to search docs, or attach a knowledge base?'</a:t>
             </a:r>
             <a:endParaRPr lang="en-US" sz="1200" dirty="0"/>
           </a:p>
@@ -9366,7 +9366,7 @@
                 <a:ea typeface="Calibri" pitchFamily="34" charset="-122"/>
                 <a:cs typeface="Calibri" pitchFamily="34" charset="-120"/>
               </a:rPr>
-              <a:t>The description carries more weight than most attendees realize. Modules 3 and 6 both come back to this.</a:t>
+              <a:t>The description carries more weight than you might realize. Modules 3 and 6 both come back to this.</a:t>
             </a:r>
             <a:endParaRPr lang="en-US" sz="1200" dirty="0"/>
           </a:p>

--- a/decks/day2/module-4-tools-layer.pptx
+++ b/decks/day2/module-4-tools-layer.pptx
@@ -10177,7 +10177,7 @@
                 <a:ea typeface="Consolas" pitchFamily="34" charset="-122"/>
                 <a:cs typeface="Consolas" pitchFamily="34" charset="-120"/>
               </a:rPr>
-              <a:t>        model: "gpt-5.4-mini",</a:t>
+              <a:t>        model: "gpt-5.6-luna",</a:t>
             </a:r>
             <a:endParaRPr lang="en-US" sz="1100" dirty="0"/>
           </a:p>

--- a/decks/day2/module-4-tools-layer.pptx
+++ b/decks/day2/module-4-tools-layer.pptx
@@ -1262,7 +1262,7 @@
 • Tool = 'agent may choose to call'
 • Knowledge = 'retrieval always happens for grounding'
 • Both together is the common production pattern
-• Module 7 covers instruction patterns for combining them</a:t>
+• Instruction and description quality is what steers the mix — the lab's Part C is where they iterate on this</a:t>
             </a:r>
             <a:endParaRPr lang="en-US" dirty="0"/>
           </a:p>
@@ -6405,7 +6405,7 @@
         <p:spPr>
           <a:xfrm>
             <a:off x="365760" y="3657600"/>
-            <a:ext cx="8412480" cy="457200"/>
+            <a:ext cx="8412480" cy="640080"/>
           </a:xfrm>
           <a:prstGeom prst="rect">
             <a:avLst/>
@@ -6429,48 +6429,9 @@
                 <a:ea typeface="Calibri" pitchFamily="34" charset="-122"/>
                 <a:cs typeface="Calibri" pitchFamily="34" charset="-120"/>
               </a:rPr>
-              <a:t>You can have both. Common pattern: knowledge base for background grounding + function tools for actions.</a:t>
+              <a:t>You can have both. Common pattern: knowledge base for background grounding + function tools for actions. Use clear instructions and tool descriptions to steer which fires when.</a:t>
             </a:r>
             <a:endParaRPr lang="en-US" sz="1300" dirty="0"/>
-          </a:p>
-        </p:txBody>
-      </p:sp>
-      <p:sp>
-        <p:nvSpPr>
-          <p:cNvPr id="8" name="Text 6"/>
-          <p:cNvSpPr/>
-          <p:nvPr/>
-        </p:nvSpPr>
-        <p:spPr>
-          <a:xfrm>
-            <a:off x="365760" y="4297680"/>
-            <a:ext cx="8412480" cy="365760"/>
-          </a:xfrm>
-          <a:prstGeom prst="rect">
-            <a:avLst/>
-          </a:prstGeom>
-          <a:noFill/>
-          <a:ln/>
-        </p:spPr>
-        <p:txBody>
-          <a:bodyPr wrap="square" rtlCol="0" anchor="ctr"/>
-          <a:lstStyle/>
-          <a:p>
-            <a:pPr indent="0" marL="0">
-              <a:buNone/>
-            </a:pPr>
-            <a:r>
-              <a:rPr lang="en-US" sz="1200" i="1" dirty="0">
-                <a:solidFill>
-                  <a:srgbClr val="6B7280"/>
-                </a:solidFill>
-                <a:latin typeface="Calibri" pitchFamily="34" charset="0"/>
-                <a:ea typeface="Calibri" pitchFamily="34" charset="-122"/>
-                <a:cs typeface="Calibri" pitchFamily="34" charset="-120"/>
-              </a:rPr>
-              <a:t>Module 7 revisits this with instruction-design patterns.</a:t>
-            </a:r>
-            <a:endParaRPr lang="en-US" sz="1200" dirty="0"/>
           </a:p>
         </p:txBody>
       </p:sp>
@@ -7687,27 +7648,6 @@
                 <a:cs typeface="Calibri" pitchFamily="34" charset="-120"/>
               </a:rPr>
               <a:t>Module 6 — authoring your own function tools in MAF</a:t>
-            </a:r>
-            <a:endParaRPr lang="en-US" sz="1300" dirty="0"/>
-          </a:p>
-          <a:p>
-            <a:pPr marL="342900" indent="-342900">
-              <a:spcAft>
-                <a:spcPts val="600"/>
-              </a:spcAft>
-              <a:buSzPct val="100000"/>
-              <a:buChar char="•"/>
-            </a:pPr>
-            <a:r>
-              <a:rPr lang="en-US" sz="1300" dirty="0">
-                <a:solidFill>
-                  <a:srgbClr val="212121"/>
-                </a:solidFill>
-                <a:latin typeface="Calibri" pitchFamily="34" charset="0"/>
-                <a:ea typeface="Calibri" pitchFamily="34" charset="-122"/>
-                <a:cs typeface="Calibri" pitchFamily="34" charset="-120"/>
-              </a:rPr>
-              <a:t>Module 7 — combining knowledge + tools (bringing it together)</a:t>
             </a:r>
             <a:endParaRPr lang="en-US" sz="1300" dirty="0"/>
           </a:p>
